--- a/images/01. Project image/SmartCache/Logo.pptx
+++ b/images/01. Project image/SmartCache/Logo.pptx
@@ -105,6 +105,11 @@
       </a:defRPr>
     </a:lvl9pPr>
   </p:defaultTextStyle>
+  <p:extLst>
+    <p:ext uri="{EFAFB233-063F-42B5-8137-9DF3F51BA10A}">
+      <p15:sldGuideLst xmlns:p15="http://schemas.microsoft.com/office/powerpoint/2012/main"/>
+    </p:ext>
+  </p:extLst>
 </p:presentation>
 </file>
 
@@ -255,7 +260,7 @@
           <a:p>
             <a:fld id="{784046E5-6622-4B04-9B44-3E42186FC053}" type="datetimeFigureOut">
               <a:rPr lang="en-US" smtClean="0"/>
-              <a:t>8/7/2023</a:t>
+              <a:t>8/16/2023</a:t>
             </a:fld>
             <a:endParaRPr lang="en-US"/>
           </a:p>
@@ -453,7 +458,7 @@
           <a:p>
             <a:fld id="{784046E5-6622-4B04-9B44-3E42186FC053}" type="datetimeFigureOut">
               <a:rPr lang="en-US" smtClean="0"/>
-              <a:t>8/7/2023</a:t>
+              <a:t>8/16/2023</a:t>
             </a:fld>
             <a:endParaRPr lang="en-US"/>
           </a:p>
@@ -661,7 +666,7 @@
           <a:p>
             <a:fld id="{784046E5-6622-4B04-9B44-3E42186FC053}" type="datetimeFigureOut">
               <a:rPr lang="en-US" smtClean="0"/>
-              <a:t>8/7/2023</a:t>
+              <a:t>8/16/2023</a:t>
             </a:fld>
             <a:endParaRPr lang="en-US"/>
           </a:p>
@@ -859,7 +864,7 @@
           <a:p>
             <a:fld id="{784046E5-6622-4B04-9B44-3E42186FC053}" type="datetimeFigureOut">
               <a:rPr lang="en-US" smtClean="0"/>
-              <a:t>8/7/2023</a:t>
+              <a:t>8/16/2023</a:t>
             </a:fld>
             <a:endParaRPr lang="en-US"/>
           </a:p>
@@ -1134,7 +1139,7 @@
           <a:p>
             <a:fld id="{784046E5-6622-4B04-9B44-3E42186FC053}" type="datetimeFigureOut">
               <a:rPr lang="en-US" smtClean="0"/>
-              <a:t>8/7/2023</a:t>
+              <a:t>8/16/2023</a:t>
             </a:fld>
             <a:endParaRPr lang="en-US"/>
           </a:p>
@@ -1399,7 +1404,7 @@
           <a:p>
             <a:fld id="{784046E5-6622-4B04-9B44-3E42186FC053}" type="datetimeFigureOut">
               <a:rPr lang="en-US" smtClean="0"/>
-              <a:t>8/7/2023</a:t>
+              <a:t>8/16/2023</a:t>
             </a:fld>
             <a:endParaRPr lang="en-US"/>
           </a:p>
@@ -1811,7 +1816,7 @@
           <a:p>
             <a:fld id="{784046E5-6622-4B04-9B44-3E42186FC053}" type="datetimeFigureOut">
               <a:rPr lang="en-US" smtClean="0"/>
-              <a:t>8/7/2023</a:t>
+              <a:t>8/16/2023</a:t>
             </a:fld>
             <a:endParaRPr lang="en-US"/>
           </a:p>
@@ -1952,7 +1957,7 @@
           <a:p>
             <a:fld id="{784046E5-6622-4B04-9B44-3E42186FC053}" type="datetimeFigureOut">
               <a:rPr lang="en-US" smtClean="0"/>
-              <a:t>8/7/2023</a:t>
+              <a:t>8/16/2023</a:t>
             </a:fld>
             <a:endParaRPr lang="en-US"/>
           </a:p>
@@ -2065,7 +2070,7 @@
           <a:p>
             <a:fld id="{784046E5-6622-4B04-9B44-3E42186FC053}" type="datetimeFigureOut">
               <a:rPr lang="en-US" smtClean="0"/>
-              <a:t>8/7/2023</a:t>
+              <a:t>8/16/2023</a:t>
             </a:fld>
             <a:endParaRPr lang="en-US"/>
           </a:p>
@@ -2376,7 +2381,7 @@
           <a:p>
             <a:fld id="{784046E5-6622-4B04-9B44-3E42186FC053}" type="datetimeFigureOut">
               <a:rPr lang="en-US" smtClean="0"/>
-              <a:t>8/7/2023</a:t>
+              <a:t>8/16/2023</a:t>
             </a:fld>
             <a:endParaRPr lang="en-US"/>
           </a:p>
@@ -2664,7 +2669,7 @@
           <a:p>
             <a:fld id="{784046E5-6622-4B04-9B44-3E42186FC053}" type="datetimeFigureOut">
               <a:rPr lang="en-US" smtClean="0"/>
-              <a:t>8/7/2023</a:t>
+              <a:t>8/16/2023</a:t>
             </a:fld>
             <a:endParaRPr lang="en-US"/>
           </a:p>
@@ -2905,7 +2910,7 @@
           <a:p>
             <a:fld id="{784046E5-6622-4B04-9B44-3E42186FC053}" type="datetimeFigureOut">
               <a:rPr lang="en-US" smtClean="0"/>
-              <a:t>8/7/2023</a:t>
+              <a:t>8/16/2023</a:t>
             </a:fld>
             <a:endParaRPr lang="en-US"/>
           </a:p>
@@ -11336,31 +11341,1934 @@
           <a:bodyPr/>
           <a:lstStyle/>
           <a:p>
+            <a:endParaRPr lang="en-US" dirty="0"/>
+          </a:p>
+        </p:txBody>
+      </p:sp>
+      <p:sp>
+        <p:nvSpPr>
+          <p:cNvPr id="27" name="Freeform: Shape 26">
+            <a:extLst>
+              <a:ext uri="{FF2B5EF4-FFF2-40B4-BE49-F238E27FC236}">
+                <a16:creationId xmlns:a16="http://schemas.microsoft.com/office/drawing/2014/main" id="{A52F26D4-D56F-51C4-5A62-4C5CB62C54B6}"/>
+              </a:ext>
+            </a:extLst>
+          </p:cNvPr>
+          <p:cNvSpPr/>
+          <p:nvPr/>
+        </p:nvSpPr>
+        <p:spPr>
+          <a:xfrm>
+            <a:off x="6460225" y="2151369"/>
+            <a:ext cx="137176" cy="137176"/>
+          </a:xfrm>
+          <a:custGeom>
+            <a:avLst/>
+            <a:gdLst>
+              <a:gd name="connsiteX0" fmla="*/ 41153 w 137176"/>
+              <a:gd name="connsiteY0" fmla="*/ 0 h 137176"/>
+              <a:gd name="connsiteX1" fmla="*/ 0 w 137176"/>
+              <a:gd name="connsiteY1" fmla="*/ 41153 h 137176"/>
+              <a:gd name="connsiteX2" fmla="*/ 0 w 137176"/>
+              <a:gd name="connsiteY2" fmla="*/ 96023 h 137176"/>
+              <a:gd name="connsiteX3" fmla="*/ 41153 w 137176"/>
+              <a:gd name="connsiteY3" fmla="*/ 137176 h 137176"/>
+              <a:gd name="connsiteX4" fmla="*/ 96023 w 137176"/>
+              <a:gd name="connsiteY4" fmla="*/ 137176 h 137176"/>
+              <a:gd name="connsiteX5" fmla="*/ 137176 w 137176"/>
+              <a:gd name="connsiteY5" fmla="*/ 96023 h 137176"/>
+              <a:gd name="connsiteX6" fmla="*/ 137176 w 137176"/>
+              <a:gd name="connsiteY6" fmla="*/ 41153 h 137176"/>
+              <a:gd name="connsiteX7" fmla="*/ 96023 w 137176"/>
+              <a:gd name="connsiteY7" fmla="*/ 0 h 137176"/>
+              <a:gd name="connsiteX8" fmla="*/ 109741 w 137176"/>
+              <a:gd name="connsiteY8" fmla="*/ 41153 h 137176"/>
+              <a:gd name="connsiteX9" fmla="*/ 109741 w 137176"/>
+              <a:gd name="connsiteY9" fmla="*/ 96023 h 137176"/>
+              <a:gd name="connsiteX10" fmla="*/ 96023 w 137176"/>
+              <a:gd name="connsiteY10" fmla="*/ 109741 h 137176"/>
+              <a:gd name="connsiteX11" fmla="*/ 41153 w 137176"/>
+              <a:gd name="connsiteY11" fmla="*/ 109741 h 137176"/>
+              <a:gd name="connsiteX12" fmla="*/ 27435 w 137176"/>
+              <a:gd name="connsiteY12" fmla="*/ 96023 h 137176"/>
+              <a:gd name="connsiteX13" fmla="*/ 27435 w 137176"/>
+              <a:gd name="connsiteY13" fmla="*/ 41153 h 137176"/>
+              <a:gd name="connsiteX14" fmla="*/ 41153 w 137176"/>
+              <a:gd name="connsiteY14" fmla="*/ 27435 h 137176"/>
+              <a:gd name="connsiteX15" fmla="*/ 96023 w 137176"/>
+              <a:gd name="connsiteY15" fmla="*/ 27435 h 137176"/>
+              <a:gd name="connsiteX16" fmla="*/ 109741 w 137176"/>
+              <a:gd name="connsiteY16" fmla="*/ 41153 h 137176"/>
+            </a:gdLst>
+            <a:ahLst/>
+            <a:cxnLst>
+              <a:cxn ang="0">
+                <a:pos x="connsiteX0" y="connsiteY0"/>
+              </a:cxn>
+              <a:cxn ang="0">
+                <a:pos x="connsiteX1" y="connsiteY1"/>
+              </a:cxn>
+              <a:cxn ang="0">
+                <a:pos x="connsiteX2" y="connsiteY2"/>
+              </a:cxn>
+              <a:cxn ang="0">
+                <a:pos x="connsiteX3" y="connsiteY3"/>
+              </a:cxn>
+              <a:cxn ang="0">
+                <a:pos x="connsiteX4" y="connsiteY4"/>
+              </a:cxn>
+              <a:cxn ang="0">
+                <a:pos x="connsiteX5" y="connsiteY5"/>
+              </a:cxn>
+              <a:cxn ang="0">
+                <a:pos x="connsiteX6" y="connsiteY6"/>
+              </a:cxn>
+              <a:cxn ang="0">
+                <a:pos x="connsiteX7" y="connsiteY7"/>
+              </a:cxn>
+              <a:cxn ang="0">
+                <a:pos x="connsiteX8" y="connsiteY8"/>
+              </a:cxn>
+              <a:cxn ang="0">
+                <a:pos x="connsiteX9" y="connsiteY9"/>
+              </a:cxn>
+              <a:cxn ang="0">
+                <a:pos x="connsiteX10" y="connsiteY10"/>
+              </a:cxn>
+              <a:cxn ang="0">
+                <a:pos x="connsiteX11" y="connsiteY11"/>
+              </a:cxn>
+              <a:cxn ang="0">
+                <a:pos x="connsiteX12" y="connsiteY12"/>
+              </a:cxn>
+              <a:cxn ang="0">
+                <a:pos x="connsiteX13" y="connsiteY13"/>
+              </a:cxn>
+              <a:cxn ang="0">
+                <a:pos x="connsiteX14" y="connsiteY14"/>
+              </a:cxn>
+              <a:cxn ang="0">
+                <a:pos x="connsiteX15" y="connsiteY15"/>
+              </a:cxn>
+              <a:cxn ang="0">
+                <a:pos x="connsiteX16" y="connsiteY16"/>
+              </a:cxn>
+            </a:cxnLst>
+            <a:rect l="l" t="t" r="r" b="b"/>
+            <a:pathLst>
+              <a:path w="137176" h="137176">
+                <a:moveTo>
+                  <a:pt x="41153" y="0"/>
+                </a:moveTo>
+                <a:cubicBezTo>
+                  <a:pt x="18424" y="0"/>
+                  <a:pt x="0" y="18424"/>
+                  <a:pt x="0" y="41153"/>
+                </a:cubicBezTo>
+                <a:lnTo>
+                  <a:pt x="0" y="96023"/>
+                </a:lnTo>
+                <a:cubicBezTo>
+                  <a:pt x="0" y="118752"/>
+                  <a:pt x="18424" y="137176"/>
+                  <a:pt x="41153" y="137176"/>
+                </a:cubicBezTo>
+                <a:lnTo>
+                  <a:pt x="96023" y="137176"/>
+                </a:lnTo>
+                <a:cubicBezTo>
+                  <a:pt x="118752" y="137176"/>
+                  <a:pt x="137176" y="118752"/>
+                  <a:pt x="137176" y="96023"/>
+                </a:cubicBezTo>
+                <a:lnTo>
+                  <a:pt x="137176" y="41153"/>
+                </a:lnTo>
+                <a:cubicBezTo>
+                  <a:pt x="137176" y="18424"/>
+                  <a:pt x="118752" y="0"/>
+                  <a:pt x="96023" y="0"/>
+                </a:cubicBezTo>
+                <a:close/>
+                <a:moveTo>
+                  <a:pt x="109741" y="41153"/>
+                </a:moveTo>
+                <a:lnTo>
+                  <a:pt x="109741" y="96023"/>
+                </a:lnTo>
+                <a:cubicBezTo>
+                  <a:pt x="109741" y="103600"/>
+                  <a:pt x="103600" y="109741"/>
+                  <a:pt x="96023" y="109741"/>
+                </a:cubicBezTo>
+                <a:lnTo>
+                  <a:pt x="41153" y="109741"/>
+                </a:lnTo>
+                <a:cubicBezTo>
+                  <a:pt x="33577" y="109741"/>
+                  <a:pt x="27435" y="103600"/>
+                  <a:pt x="27435" y="96023"/>
+                </a:cubicBezTo>
+                <a:lnTo>
+                  <a:pt x="27435" y="41153"/>
+                </a:lnTo>
+                <a:cubicBezTo>
+                  <a:pt x="27435" y="33577"/>
+                  <a:pt x="33577" y="27435"/>
+                  <a:pt x="41153" y="27435"/>
+                </a:cubicBezTo>
+                <a:lnTo>
+                  <a:pt x="96023" y="27435"/>
+                </a:lnTo>
+                <a:cubicBezTo>
+                  <a:pt x="103600" y="27435"/>
+                  <a:pt x="109741" y="33577"/>
+                  <a:pt x="109741" y="41153"/>
+                </a:cubicBezTo>
+                <a:close/>
+              </a:path>
+            </a:pathLst>
+          </a:custGeom>
+          <a:ln/>
+        </p:spPr>
+        <p:style>
+          <a:lnRef idx="3">
+            <a:schemeClr val="lt1"/>
+          </a:lnRef>
+          <a:fillRef idx="1">
+            <a:schemeClr val="accent2"/>
+          </a:fillRef>
+          <a:effectRef idx="1">
+            <a:schemeClr val="accent2"/>
+          </a:effectRef>
+          <a:fontRef idx="minor">
+            <a:schemeClr val="lt1"/>
+          </a:fontRef>
+        </p:style>
+        <p:txBody>
+          <a:bodyPr rtlCol="0" anchor="ctr"/>
+          <a:lstStyle/>
+          <a:p>
             <a:endParaRPr lang="en-US"/>
           </a:p>
         </p:txBody>
       </p:sp>
       <p:sp>
         <p:nvSpPr>
-          <p:cNvPr id="3" name="Content Placeholder 2">
+          <p:cNvPr id="28" name="Freeform: Shape 27">
             <a:extLst>
               <a:ext uri="{FF2B5EF4-FFF2-40B4-BE49-F238E27FC236}">
-                <a16:creationId xmlns:a16="http://schemas.microsoft.com/office/drawing/2014/main" id="{4B6454B3-83A0-E952-F344-377D3A8B1095}"/>
+                <a16:creationId xmlns:a16="http://schemas.microsoft.com/office/drawing/2014/main" id="{697E2317-8A41-272B-1A5D-1E9CC60E7948}"/>
               </a:ext>
             </a:extLst>
           </p:cNvPr>
-          <p:cNvSpPr>
-            <a:spLocks noGrp="1"/>
-          </p:cNvSpPr>
-          <p:nvPr>
-            <p:ph idx="1"/>
-          </p:nvPr>
+          <p:cNvSpPr/>
+          <p:nvPr/>
         </p:nvSpPr>
-        <p:spPr/>
+        <p:spPr>
+          <a:xfrm>
+            <a:off x="6652272" y="2110217"/>
+            <a:ext cx="219482" cy="219482"/>
+          </a:xfrm>
+          <a:custGeom>
+            <a:avLst/>
+            <a:gdLst>
+              <a:gd name="connsiteX0" fmla="*/ 41153 w 219482"/>
+              <a:gd name="connsiteY0" fmla="*/ 219482 h 219482"/>
+              <a:gd name="connsiteX1" fmla="*/ 178329 w 219482"/>
+              <a:gd name="connsiteY1" fmla="*/ 219482 h 219482"/>
+              <a:gd name="connsiteX2" fmla="*/ 219482 w 219482"/>
+              <a:gd name="connsiteY2" fmla="*/ 178329 h 219482"/>
+              <a:gd name="connsiteX3" fmla="*/ 219482 w 219482"/>
+              <a:gd name="connsiteY3" fmla="*/ 41153 h 219482"/>
+              <a:gd name="connsiteX4" fmla="*/ 178329 w 219482"/>
+              <a:gd name="connsiteY4" fmla="*/ 0 h 219482"/>
+              <a:gd name="connsiteX5" fmla="*/ 41153 w 219482"/>
+              <a:gd name="connsiteY5" fmla="*/ 0 h 219482"/>
+              <a:gd name="connsiteX6" fmla="*/ 0 w 219482"/>
+              <a:gd name="connsiteY6" fmla="*/ 41153 h 219482"/>
+              <a:gd name="connsiteX7" fmla="*/ 0 w 219482"/>
+              <a:gd name="connsiteY7" fmla="*/ 178329 h 219482"/>
+              <a:gd name="connsiteX8" fmla="*/ 41153 w 219482"/>
+              <a:gd name="connsiteY8" fmla="*/ 219482 h 219482"/>
+              <a:gd name="connsiteX9" fmla="*/ 27435 w 219482"/>
+              <a:gd name="connsiteY9" fmla="*/ 41153 h 219482"/>
+              <a:gd name="connsiteX10" fmla="*/ 41153 w 219482"/>
+              <a:gd name="connsiteY10" fmla="*/ 27435 h 219482"/>
+              <a:gd name="connsiteX11" fmla="*/ 178329 w 219482"/>
+              <a:gd name="connsiteY11" fmla="*/ 27435 h 219482"/>
+              <a:gd name="connsiteX12" fmla="*/ 192047 w 219482"/>
+              <a:gd name="connsiteY12" fmla="*/ 41153 h 219482"/>
+              <a:gd name="connsiteX13" fmla="*/ 192047 w 219482"/>
+              <a:gd name="connsiteY13" fmla="*/ 178329 h 219482"/>
+              <a:gd name="connsiteX14" fmla="*/ 178329 w 219482"/>
+              <a:gd name="connsiteY14" fmla="*/ 192047 h 219482"/>
+              <a:gd name="connsiteX15" fmla="*/ 41153 w 219482"/>
+              <a:gd name="connsiteY15" fmla="*/ 192047 h 219482"/>
+              <a:gd name="connsiteX16" fmla="*/ 27435 w 219482"/>
+              <a:gd name="connsiteY16" fmla="*/ 178329 h 219482"/>
+            </a:gdLst>
+            <a:ahLst/>
+            <a:cxnLst>
+              <a:cxn ang="0">
+                <a:pos x="connsiteX0" y="connsiteY0"/>
+              </a:cxn>
+              <a:cxn ang="0">
+                <a:pos x="connsiteX1" y="connsiteY1"/>
+              </a:cxn>
+              <a:cxn ang="0">
+                <a:pos x="connsiteX2" y="connsiteY2"/>
+              </a:cxn>
+              <a:cxn ang="0">
+                <a:pos x="connsiteX3" y="connsiteY3"/>
+              </a:cxn>
+              <a:cxn ang="0">
+                <a:pos x="connsiteX4" y="connsiteY4"/>
+              </a:cxn>
+              <a:cxn ang="0">
+                <a:pos x="connsiteX5" y="connsiteY5"/>
+              </a:cxn>
+              <a:cxn ang="0">
+                <a:pos x="connsiteX6" y="connsiteY6"/>
+              </a:cxn>
+              <a:cxn ang="0">
+                <a:pos x="connsiteX7" y="connsiteY7"/>
+              </a:cxn>
+              <a:cxn ang="0">
+                <a:pos x="connsiteX8" y="connsiteY8"/>
+              </a:cxn>
+              <a:cxn ang="0">
+                <a:pos x="connsiteX9" y="connsiteY9"/>
+              </a:cxn>
+              <a:cxn ang="0">
+                <a:pos x="connsiteX10" y="connsiteY10"/>
+              </a:cxn>
+              <a:cxn ang="0">
+                <a:pos x="connsiteX11" y="connsiteY11"/>
+              </a:cxn>
+              <a:cxn ang="0">
+                <a:pos x="connsiteX12" y="connsiteY12"/>
+              </a:cxn>
+              <a:cxn ang="0">
+                <a:pos x="connsiteX13" y="connsiteY13"/>
+              </a:cxn>
+              <a:cxn ang="0">
+                <a:pos x="connsiteX14" y="connsiteY14"/>
+              </a:cxn>
+              <a:cxn ang="0">
+                <a:pos x="connsiteX15" y="connsiteY15"/>
+              </a:cxn>
+              <a:cxn ang="0">
+                <a:pos x="connsiteX16" y="connsiteY16"/>
+              </a:cxn>
+            </a:cxnLst>
+            <a:rect l="l" t="t" r="r" b="b"/>
+            <a:pathLst>
+              <a:path w="219482" h="219482">
+                <a:moveTo>
+                  <a:pt x="41153" y="219482"/>
+                </a:moveTo>
+                <a:lnTo>
+                  <a:pt x="178329" y="219482"/>
+                </a:lnTo>
+                <a:cubicBezTo>
+                  <a:pt x="201058" y="219482"/>
+                  <a:pt x="219482" y="201058"/>
+                  <a:pt x="219482" y="178329"/>
+                </a:cubicBezTo>
+                <a:lnTo>
+                  <a:pt x="219482" y="41153"/>
+                </a:lnTo>
+                <a:cubicBezTo>
+                  <a:pt x="219482" y="18424"/>
+                  <a:pt x="201058" y="0"/>
+                  <a:pt x="178329" y="0"/>
+                </a:cubicBezTo>
+                <a:lnTo>
+                  <a:pt x="41153" y="0"/>
+                </a:lnTo>
+                <a:cubicBezTo>
+                  <a:pt x="18424" y="0"/>
+                  <a:pt x="0" y="18424"/>
+                  <a:pt x="0" y="41153"/>
+                </a:cubicBezTo>
+                <a:lnTo>
+                  <a:pt x="0" y="178329"/>
+                </a:lnTo>
+                <a:cubicBezTo>
+                  <a:pt x="0" y="201058"/>
+                  <a:pt x="18424" y="219482"/>
+                  <a:pt x="41153" y="219482"/>
+                </a:cubicBezTo>
+                <a:close/>
+                <a:moveTo>
+                  <a:pt x="27435" y="41153"/>
+                </a:moveTo>
+                <a:cubicBezTo>
+                  <a:pt x="27435" y="33577"/>
+                  <a:pt x="33577" y="27435"/>
+                  <a:pt x="41153" y="27435"/>
+                </a:cubicBezTo>
+                <a:lnTo>
+                  <a:pt x="178329" y="27435"/>
+                </a:lnTo>
+                <a:cubicBezTo>
+                  <a:pt x="185906" y="27435"/>
+                  <a:pt x="192047" y="33577"/>
+                  <a:pt x="192047" y="41153"/>
+                </a:cubicBezTo>
+                <a:lnTo>
+                  <a:pt x="192047" y="178329"/>
+                </a:lnTo>
+                <a:cubicBezTo>
+                  <a:pt x="192047" y="185906"/>
+                  <a:pt x="185906" y="192047"/>
+                  <a:pt x="178329" y="192047"/>
+                </a:cubicBezTo>
+                <a:lnTo>
+                  <a:pt x="41153" y="192047"/>
+                </a:lnTo>
+                <a:cubicBezTo>
+                  <a:pt x="33577" y="192047"/>
+                  <a:pt x="27435" y="185906"/>
+                  <a:pt x="27435" y="178329"/>
+                </a:cubicBezTo>
+                <a:close/>
+              </a:path>
+            </a:pathLst>
+          </a:custGeom>
+          <a:solidFill>
+            <a:srgbClr val="000000"/>
+          </a:solidFill>
+          <a:ln w="13692" cap="flat">
+            <a:noFill/>
+            <a:prstDash val="solid"/>
+            <a:miter/>
+          </a:ln>
+        </p:spPr>
         <p:txBody>
-          <a:bodyPr/>
+          <a:bodyPr rtlCol="0" anchor="ctr"/>
           <a:lstStyle/>
           <a:p>
+            <a:endParaRPr lang="en-US"/>
+          </a:p>
+        </p:txBody>
+      </p:sp>
+      <p:sp>
+        <p:nvSpPr>
+          <p:cNvPr id="29" name="Freeform: Shape 28">
+            <a:extLst>
+              <a:ext uri="{FF2B5EF4-FFF2-40B4-BE49-F238E27FC236}">
+                <a16:creationId xmlns:a16="http://schemas.microsoft.com/office/drawing/2014/main" id="{5A874A70-13D5-0A77-0979-4117F49F6F1B}"/>
+              </a:ext>
+            </a:extLst>
+          </p:cNvPr>
+          <p:cNvSpPr/>
+          <p:nvPr/>
+        </p:nvSpPr>
+        <p:spPr>
+          <a:xfrm>
+            <a:off x="6926625" y="2069064"/>
+            <a:ext cx="301787" cy="301787"/>
+          </a:xfrm>
+          <a:custGeom>
+            <a:avLst/>
+            <a:gdLst>
+              <a:gd name="connsiteX0" fmla="*/ 41153 w 301787"/>
+              <a:gd name="connsiteY0" fmla="*/ 301788 h 301787"/>
+              <a:gd name="connsiteX1" fmla="*/ 260635 w 301787"/>
+              <a:gd name="connsiteY1" fmla="*/ 301788 h 301787"/>
+              <a:gd name="connsiteX2" fmla="*/ 301788 w 301787"/>
+              <a:gd name="connsiteY2" fmla="*/ 260635 h 301787"/>
+              <a:gd name="connsiteX3" fmla="*/ 301788 w 301787"/>
+              <a:gd name="connsiteY3" fmla="*/ 41153 h 301787"/>
+              <a:gd name="connsiteX4" fmla="*/ 260635 w 301787"/>
+              <a:gd name="connsiteY4" fmla="*/ 0 h 301787"/>
+              <a:gd name="connsiteX5" fmla="*/ 41153 w 301787"/>
+              <a:gd name="connsiteY5" fmla="*/ 0 h 301787"/>
+              <a:gd name="connsiteX6" fmla="*/ 0 w 301787"/>
+              <a:gd name="connsiteY6" fmla="*/ 41153 h 301787"/>
+              <a:gd name="connsiteX7" fmla="*/ 0 w 301787"/>
+              <a:gd name="connsiteY7" fmla="*/ 260635 h 301787"/>
+              <a:gd name="connsiteX8" fmla="*/ 41153 w 301787"/>
+              <a:gd name="connsiteY8" fmla="*/ 301788 h 301787"/>
+              <a:gd name="connsiteX9" fmla="*/ 27435 w 301787"/>
+              <a:gd name="connsiteY9" fmla="*/ 41153 h 301787"/>
+              <a:gd name="connsiteX10" fmla="*/ 41153 w 301787"/>
+              <a:gd name="connsiteY10" fmla="*/ 27435 h 301787"/>
+              <a:gd name="connsiteX11" fmla="*/ 260635 w 301787"/>
+              <a:gd name="connsiteY11" fmla="*/ 27435 h 301787"/>
+              <a:gd name="connsiteX12" fmla="*/ 274353 w 301787"/>
+              <a:gd name="connsiteY12" fmla="*/ 41153 h 301787"/>
+              <a:gd name="connsiteX13" fmla="*/ 274353 w 301787"/>
+              <a:gd name="connsiteY13" fmla="*/ 260635 h 301787"/>
+              <a:gd name="connsiteX14" fmla="*/ 260635 w 301787"/>
+              <a:gd name="connsiteY14" fmla="*/ 274353 h 301787"/>
+              <a:gd name="connsiteX15" fmla="*/ 41153 w 301787"/>
+              <a:gd name="connsiteY15" fmla="*/ 274353 h 301787"/>
+              <a:gd name="connsiteX16" fmla="*/ 27435 w 301787"/>
+              <a:gd name="connsiteY16" fmla="*/ 260635 h 301787"/>
+            </a:gdLst>
+            <a:ahLst/>
+            <a:cxnLst>
+              <a:cxn ang="0">
+                <a:pos x="connsiteX0" y="connsiteY0"/>
+              </a:cxn>
+              <a:cxn ang="0">
+                <a:pos x="connsiteX1" y="connsiteY1"/>
+              </a:cxn>
+              <a:cxn ang="0">
+                <a:pos x="connsiteX2" y="connsiteY2"/>
+              </a:cxn>
+              <a:cxn ang="0">
+                <a:pos x="connsiteX3" y="connsiteY3"/>
+              </a:cxn>
+              <a:cxn ang="0">
+                <a:pos x="connsiteX4" y="connsiteY4"/>
+              </a:cxn>
+              <a:cxn ang="0">
+                <a:pos x="connsiteX5" y="connsiteY5"/>
+              </a:cxn>
+              <a:cxn ang="0">
+                <a:pos x="connsiteX6" y="connsiteY6"/>
+              </a:cxn>
+              <a:cxn ang="0">
+                <a:pos x="connsiteX7" y="connsiteY7"/>
+              </a:cxn>
+              <a:cxn ang="0">
+                <a:pos x="connsiteX8" y="connsiteY8"/>
+              </a:cxn>
+              <a:cxn ang="0">
+                <a:pos x="connsiteX9" y="connsiteY9"/>
+              </a:cxn>
+              <a:cxn ang="0">
+                <a:pos x="connsiteX10" y="connsiteY10"/>
+              </a:cxn>
+              <a:cxn ang="0">
+                <a:pos x="connsiteX11" y="connsiteY11"/>
+              </a:cxn>
+              <a:cxn ang="0">
+                <a:pos x="connsiteX12" y="connsiteY12"/>
+              </a:cxn>
+              <a:cxn ang="0">
+                <a:pos x="connsiteX13" y="connsiteY13"/>
+              </a:cxn>
+              <a:cxn ang="0">
+                <a:pos x="connsiteX14" y="connsiteY14"/>
+              </a:cxn>
+              <a:cxn ang="0">
+                <a:pos x="connsiteX15" y="connsiteY15"/>
+              </a:cxn>
+              <a:cxn ang="0">
+                <a:pos x="connsiteX16" y="connsiteY16"/>
+              </a:cxn>
+            </a:cxnLst>
+            <a:rect l="l" t="t" r="r" b="b"/>
+            <a:pathLst>
+              <a:path w="301787" h="301787">
+                <a:moveTo>
+                  <a:pt x="41153" y="301788"/>
+                </a:moveTo>
+                <a:lnTo>
+                  <a:pt x="260635" y="301788"/>
+                </a:lnTo>
+                <a:cubicBezTo>
+                  <a:pt x="283364" y="301788"/>
+                  <a:pt x="301788" y="283364"/>
+                  <a:pt x="301788" y="260635"/>
+                </a:cubicBezTo>
+                <a:lnTo>
+                  <a:pt x="301788" y="41153"/>
+                </a:lnTo>
+                <a:cubicBezTo>
+                  <a:pt x="301788" y="18424"/>
+                  <a:pt x="283364" y="0"/>
+                  <a:pt x="260635" y="0"/>
+                </a:cubicBezTo>
+                <a:lnTo>
+                  <a:pt x="41153" y="0"/>
+                </a:lnTo>
+                <a:cubicBezTo>
+                  <a:pt x="18424" y="0"/>
+                  <a:pt x="0" y="18424"/>
+                  <a:pt x="0" y="41153"/>
+                </a:cubicBezTo>
+                <a:lnTo>
+                  <a:pt x="0" y="260635"/>
+                </a:lnTo>
+                <a:cubicBezTo>
+                  <a:pt x="0" y="283364"/>
+                  <a:pt x="18424" y="301788"/>
+                  <a:pt x="41153" y="301788"/>
+                </a:cubicBezTo>
+                <a:close/>
+                <a:moveTo>
+                  <a:pt x="27435" y="41153"/>
+                </a:moveTo>
+                <a:cubicBezTo>
+                  <a:pt x="27435" y="33577"/>
+                  <a:pt x="33577" y="27435"/>
+                  <a:pt x="41153" y="27435"/>
+                </a:cubicBezTo>
+                <a:lnTo>
+                  <a:pt x="260635" y="27435"/>
+                </a:lnTo>
+                <a:cubicBezTo>
+                  <a:pt x="268211" y="27435"/>
+                  <a:pt x="274353" y="33577"/>
+                  <a:pt x="274353" y="41153"/>
+                </a:cubicBezTo>
+                <a:lnTo>
+                  <a:pt x="274353" y="260635"/>
+                </a:lnTo>
+                <a:cubicBezTo>
+                  <a:pt x="274353" y="268211"/>
+                  <a:pt x="268211" y="274353"/>
+                  <a:pt x="260635" y="274353"/>
+                </a:cubicBezTo>
+                <a:lnTo>
+                  <a:pt x="41153" y="274353"/>
+                </a:lnTo>
+                <a:cubicBezTo>
+                  <a:pt x="33577" y="274353"/>
+                  <a:pt x="27435" y="268211"/>
+                  <a:pt x="27435" y="260635"/>
+                </a:cubicBezTo>
+                <a:close/>
+              </a:path>
+            </a:pathLst>
+          </a:custGeom>
+          <a:solidFill>
+            <a:srgbClr val="000000"/>
+          </a:solidFill>
+          <a:ln w="13692" cap="flat">
+            <a:noFill/>
+            <a:prstDash val="solid"/>
+            <a:miter/>
+          </a:ln>
+        </p:spPr>
+        <p:txBody>
+          <a:bodyPr rtlCol="0" anchor="ctr"/>
+          <a:lstStyle/>
+          <a:p>
+            <a:endParaRPr lang="en-US"/>
+          </a:p>
+        </p:txBody>
+      </p:sp>
+      <p:sp>
+        <p:nvSpPr>
+          <p:cNvPr id="17" name="Freeform: Shape 16">
+            <a:extLst>
+              <a:ext uri="{FF2B5EF4-FFF2-40B4-BE49-F238E27FC236}">
+                <a16:creationId xmlns:a16="http://schemas.microsoft.com/office/drawing/2014/main" id="{BF0B1F07-7C67-AF83-F03F-EDCD93132611}"/>
+              </a:ext>
+            </a:extLst>
+          </p:cNvPr>
+          <p:cNvSpPr/>
+          <p:nvPr/>
+        </p:nvSpPr>
+        <p:spPr>
+          <a:xfrm>
+            <a:off x="6311243" y="4878998"/>
+            <a:ext cx="184923" cy="260333"/>
+          </a:xfrm>
+          <a:custGeom>
+            <a:avLst/>
+            <a:gdLst>
+              <a:gd name="connsiteX0" fmla="*/ 0 w 184923"/>
+              <a:gd name="connsiteY0" fmla="*/ 260334 h 260333"/>
+              <a:gd name="connsiteX1" fmla="*/ 184923 w 184923"/>
+              <a:gd name="connsiteY1" fmla="*/ 130167 h 260333"/>
+              <a:gd name="connsiteX2" fmla="*/ 0 w 184923"/>
+              <a:gd name="connsiteY2" fmla="*/ 0 h 260333"/>
+              <a:gd name="connsiteX3" fmla="*/ 0 w 184923"/>
+              <a:gd name="connsiteY3" fmla="*/ 260334 h 260333"/>
+            </a:gdLst>
+            <a:ahLst/>
+            <a:cxnLst>
+              <a:cxn ang="0">
+                <a:pos x="connsiteX0" y="connsiteY0"/>
+              </a:cxn>
+              <a:cxn ang="0">
+                <a:pos x="connsiteX1" y="connsiteY1"/>
+              </a:cxn>
+              <a:cxn ang="0">
+                <a:pos x="connsiteX2" y="connsiteY2"/>
+              </a:cxn>
+              <a:cxn ang="0">
+                <a:pos x="connsiteX3" y="connsiteY3"/>
+              </a:cxn>
+            </a:cxnLst>
+            <a:rect l="l" t="t" r="r" b="b"/>
+            <a:pathLst>
+              <a:path w="184923" h="260333">
+                <a:moveTo>
+                  <a:pt x="0" y="260334"/>
+                </a:moveTo>
+                <a:lnTo>
+                  <a:pt x="184923" y="130167"/>
+                </a:lnTo>
+                <a:lnTo>
+                  <a:pt x="0" y="0"/>
+                </a:lnTo>
+                <a:lnTo>
+                  <a:pt x="0" y="260334"/>
+                </a:lnTo>
+                <a:close/>
+              </a:path>
+            </a:pathLst>
+          </a:custGeom>
+          <a:solidFill>
+            <a:srgbClr val="000000"/>
+          </a:solidFill>
+          <a:ln w="6251" cap="flat">
+            <a:noFill/>
+            <a:prstDash val="solid"/>
+            <a:miter/>
+          </a:ln>
+        </p:spPr>
+        <p:txBody>
+          <a:bodyPr rtlCol="0" anchor="ctr"/>
+          <a:lstStyle/>
+          <a:p>
+            <a:endParaRPr lang="en-US"/>
+          </a:p>
+        </p:txBody>
+      </p:sp>
+      <p:sp>
+        <p:nvSpPr>
+          <p:cNvPr id="18" name="Freeform: Shape 17">
+            <a:extLst>
+              <a:ext uri="{FF2B5EF4-FFF2-40B4-BE49-F238E27FC236}">
+                <a16:creationId xmlns:a16="http://schemas.microsoft.com/office/drawing/2014/main" id="{87035983-1D66-6621-6328-5AA1497FED0A}"/>
+              </a:ext>
+            </a:extLst>
+          </p:cNvPr>
+          <p:cNvSpPr/>
+          <p:nvPr/>
+        </p:nvSpPr>
+        <p:spPr>
+          <a:xfrm>
+            <a:off x="6505569" y="4878998"/>
+            <a:ext cx="184923" cy="260333"/>
+          </a:xfrm>
+          <a:custGeom>
+            <a:avLst/>
+            <a:gdLst>
+              <a:gd name="connsiteX0" fmla="*/ 0 w 184923"/>
+              <a:gd name="connsiteY0" fmla="*/ 260334 h 260333"/>
+              <a:gd name="connsiteX1" fmla="*/ 184923 w 184923"/>
+              <a:gd name="connsiteY1" fmla="*/ 130167 h 260333"/>
+              <a:gd name="connsiteX2" fmla="*/ 0 w 184923"/>
+              <a:gd name="connsiteY2" fmla="*/ 0 h 260333"/>
+              <a:gd name="connsiteX3" fmla="*/ 0 w 184923"/>
+              <a:gd name="connsiteY3" fmla="*/ 260334 h 260333"/>
+            </a:gdLst>
+            <a:ahLst/>
+            <a:cxnLst>
+              <a:cxn ang="0">
+                <a:pos x="connsiteX0" y="connsiteY0"/>
+              </a:cxn>
+              <a:cxn ang="0">
+                <a:pos x="connsiteX1" y="connsiteY1"/>
+              </a:cxn>
+              <a:cxn ang="0">
+                <a:pos x="connsiteX2" y="connsiteY2"/>
+              </a:cxn>
+              <a:cxn ang="0">
+                <a:pos x="connsiteX3" y="connsiteY3"/>
+              </a:cxn>
+            </a:cxnLst>
+            <a:rect l="l" t="t" r="r" b="b"/>
+            <a:pathLst>
+              <a:path w="184923" h="260333">
+                <a:moveTo>
+                  <a:pt x="0" y="260334"/>
+                </a:moveTo>
+                <a:lnTo>
+                  <a:pt x="184923" y="130167"/>
+                </a:lnTo>
+                <a:lnTo>
+                  <a:pt x="0" y="0"/>
+                </a:lnTo>
+                <a:lnTo>
+                  <a:pt x="0" y="260334"/>
+                </a:lnTo>
+                <a:close/>
+              </a:path>
+            </a:pathLst>
+          </a:custGeom>
+          <a:solidFill>
+            <a:srgbClr val="000000"/>
+          </a:solidFill>
+          <a:ln w="6251" cap="flat">
+            <a:noFill/>
+            <a:prstDash val="solid"/>
+            <a:miter/>
+          </a:ln>
+        </p:spPr>
+        <p:txBody>
+          <a:bodyPr rtlCol="0" anchor="ctr"/>
+          <a:lstStyle/>
+          <a:p>
+            <a:endParaRPr lang="en-US"/>
+          </a:p>
+        </p:txBody>
+      </p:sp>
+      <p:sp>
+        <p:nvSpPr>
+          <p:cNvPr id="13" name="Freeform: Shape 12">
+            <a:extLst>
+              <a:ext uri="{FF2B5EF4-FFF2-40B4-BE49-F238E27FC236}">
+                <a16:creationId xmlns:a16="http://schemas.microsoft.com/office/drawing/2014/main" id="{BF387897-8A0F-C98F-E48A-74140F6641AA}"/>
+              </a:ext>
+            </a:extLst>
+          </p:cNvPr>
+          <p:cNvSpPr/>
+          <p:nvPr/>
+        </p:nvSpPr>
+        <p:spPr>
+          <a:xfrm>
+            <a:off x="6460225" y="2516144"/>
+            <a:ext cx="137176" cy="137176"/>
+          </a:xfrm>
+          <a:custGeom>
+            <a:avLst/>
+            <a:gdLst>
+              <a:gd name="connsiteX0" fmla="*/ 41153 w 137176"/>
+              <a:gd name="connsiteY0" fmla="*/ 0 h 137176"/>
+              <a:gd name="connsiteX1" fmla="*/ 0 w 137176"/>
+              <a:gd name="connsiteY1" fmla="*/ 41153 h 137176"/>
+              <a:gd name="connsiteX2" fmla="*/ 0 w 137176"/>
+              <a:gd name="connsiteY2" fmla="*/ 96023 h 137176"/>
+              <a:gd name="connsiteX3" fmla="*/ 41153 w 137176"/>
+              <a:gd name="connsiteY3" fmla="*/ 137176 h 137176"/>
+              <a:gd name="connsiteX4" fmla="*/ 96023 w 137176"/>
+              <a:gd name="connsiteY4" fmla="*/ 137176 h 137176"/>
+              <a:gd name="connsiteX5" fmla="*/ 137176 w 137176"/>
+              <a:gd name="connsiteY5" fmla="*/ 96023 h 137176"/>
+              <a:gd name="connsiteX6" fmla="*/ 137176 w 137176"/>
+              <a:gd name="connsiteY6" fmla="*/ 41153 h 137176"/>
+              <a:gd name="connsiteX7" fmla="*/ 96023 w 137176"/>
+              <a:gd name="connsiteY7" fmla="*/ 0 h 137176"/>
+              <a:gd name="connsiteX8" fmla="*/ 109741 w 137176"/>
+              <a:gd name="connsiteY8" fmla="*/ 41153 h 137176"/>
+              <a:gd name="connsiteX9" fmla="*/ 109741 w 137176"/>
+              <a:gd name="connsiteY9" fmla="*/ 96023 h 137176"/>
+              <a:gd name="connsiteX10" fmla="*/ 96023 w 137176"/>
+              <a:gd name="connsiteY10" fmla="*/ 109741 h 137176"/>
+              <a:gd name="connsiteX11" fmla="*/ 41153 w 137176"/>
+              <a:gd name="connsiteY11" fmla="*/ 109741 h 137176"/>
+              <a:gd name="connsiteX12" fmla="*/ 27435 w 137176"/>
+              <a:gd name="connsiteY12" fmla="*/ 96023 h 137176"/>
+              <a:gd name="connsiteX13" fmla="*/ 27435 w 137176"/>
+              <a:gd name="connsiteY13" fmla="*/ 41153 h 137176"/>
+              <a:gd name="connsiteX14" fmla="*/ 41153 w 137176"/>
+              <a:gd name="connsiteY14" fmla="*/ 27435 h 137176"/>
+              <a:gd name="connsiteX15" fmla="*/ 96023 w 137176"/>
+              <a:gd name="connsiteY15" fmla="*/ 27435 h 137176"/>
+              <a:gd name="connsiteX16" fmla="*/ 109741 w 137176"/>
+              <a:gd name="connsiteY16" fmla="*/ 41153 h 137176"/>
+            </a:gdLst>
+            <a:ahLst/>
+            <a:cxnLst>
+              <a:cxn ang="0">
+                <a:pos x="connsiteX0" y="connsiteY0"/>
+              </a:cxn>
+              <a:cxn ang="0">
+                <a:pos x="connsiteX1" y="connsiteY1"/>
+              </a:cxn>
+              <a:cxn ang="0">
+                <a:pos x="connsiteX2" y="connsiteY2"/>
+              </a:cxn>
+              <a:cxn ang="0">
+                <a:pos x="connsiteX3" y="connsiteY3"/>
+              </a:cxn>
+              <a:cxn ang="0">
+                <a:pos x="connsiteX4" y="connsiteY4"/>
+              </a:cxn>
+              <a:cxn ang="0">
+                <a:pos x="connsiteX5" y="connsiteY5"/>
+              </a:cxn>
+              <a:cxn ang="0">
+                <a:pos x="connsiteX6" y="connsiteY6"/>
+              </a:cxn>
+              <a:cxn ang="0">
+                <a:pos x="connsiteX7" y="connsiteY7"/>
+              </a:cxn>
+              <a:cxn ang="0">
+                <a:pos x="connsiteX8" y="connsiteY8"/>
+              </a:cxn>
+              <a:cxn ang="0">
+                <a:pos x="connsiteX9" y="connsiteY9"/>
+              </a:cxn>
+              <a:cxn ang="0">
+                <a:pos x="connsiteX10" y="connsiteY10"/>
+              </a:cxn>
+              <a:cxn ang="0">
+                <a:pos x="connsiteX11" y="connsiteY11"/>
+              </a:cxn>
+              <a:cxn ang="0">
+                <a:pos x="connsiteX12" y="connsiteY12"/>
+              </a:cxn>
+              <a:cxn ang="0">
+                <a:pos x="connsiteX13" y="connsiteY13"/>
+              </a:cxn>
+              <a:cxn ang="0">
+                <a:pos x="connsiteX14" y="connsiteY14"/>
+              </a:cxn>
+              <a:cxn ang="0">
+                <a:pos x="connsiteX15" y="connsiteY15"/>
+              </a:cxn>
+              <a:cxn ang="0">
+                <a:pos x="connsiteX16" y="connsiteY16"/>
+              </a:cxn>
+            </a:cxnLst>
+            <a:rect l="l" t="t" r="r" b="b"/>
+            <a:pathLst>
+              <a:path w="137176" h="137176">
+                <a:moveTo>
+                  <a:pt x="41153" y="0"/>
+                </a:moveTo>
+                <a:cubicBezTo>
+                  <a:pt x="18424" y="0"/>
+                  <a:pt x="0" y="18424"/>
+                  <a:pt x="0" y="41153"/>
+                </a:cubicBezTo>
+                <a:lnTo>
+                  <a:pt x="0" y="96023"/>
+                </a:lnTo>
+                <a:cubicBezTo>
+                  <a:pt x="0" y="118752"/>
+                  <a:pt x="18424" y="137176"/>
+                  <a:pt x="41153" y="137176"/>
+                </a:cubicBezTo>
+                <a:lnTo>
+                  <a:pt x="96023" y="137176"/>
+                </a:lnTo>
+                <a:cubicBezTo>
+                  <a:pt x="118752" y="137176"/>
+                  <a:pt x="137176" y="118752"/>
+                  <a:pt x="137176" y="96023"/>
+                </a:cubicBezTo>
+                <a:lnTo>
+                  <a:pt x="137176" y="41153"/>
+                </a:lnTo>
+                <a:cubicBezTo>
+                  <a:pt x="137176" y="18424"/>
+                  <a:pt x="118752" y="0"/>
+                  <a:pt x="96023" y="0"/>
+                </a:cubicBezTo>
+                <a:close/>
+                <a:moveTo>
+                  <a:pt x="109741" y="41153"/>
+                </a:moveTo>
+                <a:lnTo>
+                  <a:pt x="109741" y="96023"/>
+                </a:lnTo>
+                <a:cubicBezTo>
+                  <a:pt x="109741" y="103600"/>
+                  <a:pt x="103600" y="109741"/>
+                  <a:pt x="96023" y="109741"/>
+                </a:cubicBezTo>
+                <a:lnTo>
+                  <a:pt x="41153" y="109741"/>
+                </a:lnTo>
+                <a:cubicBezTo>
+                  <a:pt x="33577" y="109741"/>
+                  <a:pt x="27435" y="103600"/>
+                  <a:pt x="27435" y="96023"/>
+                </a:cubicBezTo>
+                <a:lnTo>
+                  <a:pt x="27435" y="41153"/>
+                </a:lnTo>
+                <a:cubicBezTo>
+                  <a:pt x="27435" y="33577"/>
+                  <a:pt x="33577" y="27435"/>
+                  <a:pt x="41153" y="27435"/>
+                </a:cubicBezTo>
+                <a:lnTo>
+                  <a:pt x="96023" y="27435"/>
+                </a:lnTo>
+                <a:cubicBezTo>
+                  <a:pt x="103600" y="27435"/>
+                  <a:pt x="109741" y="33577"/>
+                  <a:pt x="109741" y="41153"/>
+                </a:cubicBezTo>
+                <a:close/>
+              </a:path>
+            </a:pathLst>
+          </a:custGeom>
+          <a:ln/>
+        </p:spPr>
+        <p:style>
+          <a:lnRef idx="3">
+            <a:schemeClr val="lt1"/>
+          </a:lnRef>
+          <a:fillRef idx="1">
+            <a:schemeClr val="accent2"/>
+          </a:fillRef>
+          <a:effectRef idx="1">
+            <a:schemeClr val="accent2"/>
+          </a:effectRef>
+          <a:fontRef idx="minor">
+            <a:schemeClr val="lt1"/>
+          </a:fontRef>
+        </p:style>
+        <p:txBody>
+          <a:bodyPr rtlCol="0" anchor="ctr"/>
+          <a:lstStyle/>
+          <a:p>
+            <a:endParaRPr lang="en-US"/>
+          </a:p>
+        </p:txBody>
+      </p:sp>
+      <p:sp>
+        <p:nvSpPr>
+          <p:cNvPr id="14" name="Freeform: Shape 13">
+            <a:extLst>
+              <a:ext uri="{FF2B5EF4-FFF2-40B4-BE49-F238E27FC236}">
+                <a16:creationId xmlns:a16="http://schemas.microsoft.com/office/drawing/2014/main" id="{1D95581E-998B-863C-524B-ACD7AE7896C6}"/>
+              </a:ext>
+            </a:extLst>
+          </p:cNvPr>
+          <p:cNvSpPr/>
+          <p:nvPr/>
+        </p:nvSpPr>
+        <p:spPr>
+          <a:xfrm>
+            <a:off x="6652272" y="2474992"/>
+            <a:ext cx="219482" cy="219482"/>
+          </a:xfrm>
+          <a:custGeom>
+            <a:avLst/>
+            <a:gdLst>
+              <a:gd name="connsiteX0" fmla="*/ 41153 w 219482"/>
+              <a:gd name="connsiteY0" fmla="*/ 219482 h 219482"/>
+              <a:gd name="connsiteX1" fmla="*/ 178329 w 219482"/>
+              <a:gd name="connsiteY1" fmla="*/ 219482 h 219482"/>
+              <a:gd name="connsiteX2" fmla="*/ 219482 w 219482"/>
+              <a:gd name="connsiteY2" fmla="*/ 178329 h 219482"/>
+              <a:gd name="connsiteX3" fmla="*/ 219482 w 219482"/>
+              <a:gd name="connsiteY3" fmla="*/ 41153 h 219482"/>
+              <a:gd name="connsiteX4" fmla="*/ 178329 w 219482"/>
+              <a:gd name="connsiteY4" fmla="*/ 0 h 219482"/>
+              <a:gd name="connsiteX5" fmla="*/ 41153 w 219482"/>
+              <a:gd name="connsiteY5" fmla="*/ 0 h 219482"/>
+              <a:gd name="connsiteX6" fmla="*/ 0 w 219482"/>
+              <a:gd name="connsiteY6" fmla="*/ 41153 h 219482"/>
+              <a:gd name="connsiteX7" fmla="*/ 0 w 219482"/>
+              <a:gd name="connsiteY7" fmla="*/ 178329 h 219482"/>
+              <a:gd name="connsiteX8" fmla="*/ 41153 w 219482"/>
+              <a:gd name="connsiteY8" fmla="*/ 219482 h 219482"/>
+              <a:gd name="connsiteX9" fmla="*/ 27435 w 219482"/>
+              <a:gd name="connsiteY9" fmla="*/ 41153 h 219482"/>
+              <a:gd name="connsiteX10" fmla="*/ 41153 w 219482"/>
+              <a:gd name="connsiteY10" fmla="*/ 27435 h 219482"/>
+              <a:gd name="connsiteX11" fmla="*/ 178329 w 219482"/>
+              <a:gd name="connsiteY11" fmla="*/ 27435 h 219482"/>
+              <a:gd name="connsiteX12" fmla="*/ 192047 w 219482"/>
+              <a:gd name="connsiteY12" fmla="*/ 41153 h 219482"/>
+              <a:gd name="connsiteX13" fmla="*/ 192047 w 219482"/>
+              <a:gd name="connsiteY13" fmla="*/ 178329 h 219482"/>
+              <a:gd name="connsiteX14" fmla="*/ 178329 w 219482"/>
+              <a:gd name="connsiteY14" fmla="*/ 192047 h 219482"/>
+              <a:gd name="connsiteX15" fmla="*/ 41153 w 219482"/>
+              <a:gd name="connsiteY15" fmla="*/ 192047 h 219482"/>
+              <a:gd name="connsiteX16" fmla="*/ 27435 w 219482"/>
+              <a:gd name="connsiteY16" fmla="*/ 178329 h 219482"/>
+            </a:gdLst>
+            <a:ahLst/>
+            <a:cxnLst>
+              <a:cxn ang="0">
+                <a:pos x="connsiteX0" y="connsiteY0"/>
+              </a:cxn>
+              <a:cxn ang="0">
+                <a:pos x="connsiteX1" y="connsiteY1"/>
+              </a:cxn>
+              <a:cxn ang="0">
+                <a:pos x="connsiteX2" y="connsiteY2"/>
+              </a:cxn>
+              <a:cxn ang="0">
+                <a:pos x="connsiteX3" y="connsiteY3"/>
+              </a:cxn>
+              <a:cxn ang="0">
+                <a:pos x="connsiteX4" y="connsiteY4"/>
+              </a:cxn>
+              <a:cxn ang="0">
+                <a:pos x="connsiteX5" y="connsiteY5"/>
+              </a:cxn>
+              <a:cxn ang="0">
+                <a:pos x="connsiteX6" y="connsiteY6"/>
+              </a:cxn>
+              <a:cxn ang="0">
+                <a:pos x="connsiteX7" y="connsiteY7"/>
+              </a:cxn>
+              <a:cxn ang="0">
+                <a:pos x="connsiteX8" y="connsiteY8"/>
+              </a:cxn>
+              <a:cxn ang="0">
+                <a:pos x="connsiteX9" y="connsiteY9"/>
+              </a:cxn>
+              <a:cxn ang="0">
+                <a:pos x="connsiteX10" y="connsiteY10"/>
+              </a:cxn>
+              <a:cxn ang="0">
+                <a:pos x="connsiteX11" y="connsiteY11"/>
+              </a:cxn>
+              <a:cxn ang="0">
+                <a:pos x="connsiteX12" y="connsiteY12"/>
+              </a:cxn>
+              <a:cxn ang="0">
+                <a:pos x="connsiteX13" y="connsiteY13"/>
+              </a:cxn>
+              <a:cxn ang="0">
+                <a:pos x="connsiteX14" y="connsiteY14"/>
+              </a:cxn>
+              <a:cxn ang="0">
+                <a:pos x="connsiteX15" y="connsiteY15"/>
+              </a:cxn>
+              <a:cxn ang="0">
+                <a:pos x="connsiteX16" y="connsiteY16"/>
+              </a:cxn>
+            </a:cxnLst>
+            <a:rect l="l" t="t" r="r" b="b"/>
+            <a:pathLst>
+              <a:path w="219482" h="219482">
+                <a:moveTo>
+                  <a:pt x="41153" y="219482"/>
+                </a:moveTo>
+                <a:lnTo>
+                  <a:pt x="178329" y="219482"/>
+                </a:lnTo>
+                <a:cubicBezTo>
+                  <a:pt x="201058" y="219482"/>
+                  <a:pt x="219482" y="201058"/>
+                  <a:pt x="219482" y="178329"/>
+                </a:cubicBezTo>
+                <a:lnTo>
+                  <a:pt x="219482" y="41153"/>
+                </a:lnTo>
+                <a:cubicBezTo>
+                  <a:pt x="219482" y="18424"/>
+                  <a:pt x="201058" y="0"/>
+                  <a:pt x="178329" y="0"/>
+                </a:cubicBezTo>
+                <a:lnTo>
+                  <a:pt x="41153" y="0"/>
+                </a:lnTo>
+                <a:cubicBezTo>
+                  <a:pt x="18424" y="0"/>
+                  <a:pt x="0" y="18424"/>
+                  <a:pt x="0" y="41153"/>
+                </a:cubicBezTo>
+                <a:lnTo>
+                  <a:pt x="0" y="178329"/>
+                </a:lnTo>
+                <a:cubicBezTo>
+                  <a:pt x="0" y="201058"/>
+                  <a:pt x="18424" y="219482"/>
+                  <a:pt x="41153" y="219482"/>
+                </a:cubicBezTo>
+                <a:close/>
+                <a:moveTo>
+                  <a:pt x="27435" y="41153"/>
+                </a:moveTo>
+                <a:cubicBezTo>
+                  <a:pt x="27435" y="33577"/>
+                  <a:pt x="33577" y="27435"/>
+                  <a:pt x="41153" y="27435"/>
+                </a:cubicBezTo>
+                <a:lnTo>
+                  <a:pt x="178329" y="27435"/>
+                </a:lnTo>
+                <a:cubicBezTo>
+                  <a:pt x="185906" y="27435"/>
+                  <a:pt x="192047" y="33577"/>
+                  <a:pt x="192047" y="41153"/>
+                </a:cubicBezTo>
+                <a:lnTo>
+                  <a:pt x="192047" y="178329"/>
+                </a:lnTo>
+                <a:cubicBezTo>
+                  <a:pt x="192047" y="185906"/>
+                  <a:pt x="185906" y="192047"/>
+                  <a:pt x="178329" y="192047"/>
+                </a:cubicBezTo>
+                <a:lnTo>
+                  <a:pt x="41153" y="192047"/>
+                </a:lnTo>
+                <a:cubicBezTo>
+                  <a:pt x="33577" y="192047"/>
+                  <a:pt x="27435" y="185906"/>
+                  <a:pt x="27435" y="178329"/>
+                </a:cubicBezTo>
+                <a:close/>
+              </a:path>
+            </a:pathLst>
+          </a:custGeom>
+          <a:solidFill>
+            <a:srgbClr val="000000"/>
+          </a:solidFill>
+          <a:ln w="13692" cap="flat">
+            <a:noFill/>
+            <a:prstDash val="solid"/>
+            <a:miter/>
+          </a:ln>
+        </p:spPr>
+        <p:txBody>
+          <a:bodyPr rtlCol="0" anchor="ctr"/>
+          <a:lstStyle/>
+          <a:p>
+            <a:endParaRPr lang="en-US"/>
+          </a:p>
+        </p:txBody>
+      </p:sp>
+      <p:sp>
+        <p:nvSpPr>
+          <p:cNvPr id="15" name="Freeform: Shape 14">
+            <a:extLst>
+              <a:ext uri="{FF2B5EF4-FFF2-40B4-BE49-F238E27FC236}">
+                <a16:creationId xmlns:a16="http://schemas.microsoft.com/office/drawing/2014/main" id="{20C5BFB2-BFB4-3F09-3001-D793096A04B4}"/>
+              </a:ext>
+            </a:extLst>
+          </p:cNvPr>
+          <p:cNvSpPr/>
+          <p:nvPr/>
+        </p:nvSpPr>
+        <p:spPr>
+          <a:xfrm>
+            <a:off x="6926625" y="2433839"/>
+            <a:ext cx="301787" cy="301787"/>
+          </a:xfrm>
+          <a:custGeom>
+            <a:avLst/>
+            <a:gdLst>
+              <a:gd name="connsiteX0" fmla="*/ 41153 w 301787"/>
+              <a:gd name="connsiteY0" fmla="*/ 301788 h 301787"/>
+              <a:gd name="connsiteX1" fmla="*/ 260635 w 301787"/>
+              <a:gd name="connsiteY1" fmla="*/ 301788 h 301787"/>
+              <a:gd name="connsiteX2" fmla="*/ 301788 w 301787"/>
+              <a:gd name="connsiteY2" fmla="*/ 260635 h 301787"/>
+              <a:gd name="connsiteX3" fmla="*/ 301788 w 301787"/>
+              <a:gd name="connsiteY3" fmla="*/ 41153 h 301787"/>
+              <a:gd name="connsiteX4" fmla="*/ 260635 w 301787"/>
+              <a:gd name="connsiteY4" fmla="*/ 0 h 301787"/>
+              <a:gd name="connsiteX5" fmla="*/ 41153 w 301787"/>
+              <a:gd name="connsiteY5" fmla="*/ 0 h 301787"/>
+              <a:gd name="connsiteX6" fmla="*/ 0 w 301787"/>
+              <a:gd name="connsiteY6" fmla="*/ 41153 h 301787"/>
+              <a:gd name="connsiteX7" fmla="*/ 0 w 301787"/>
+              <a:gd name="connsiteY7" fmla="*/ 260635 h 301787"/>
+              <a:gd name="connsiteX8" fmla="*/ 41153 w 301787"/>
+              <a:gd name="connsiteY8" fmla="*/ 301788 h 301787"/>
+              <a:gd name="connsiteX9" fmla="*/ 27435 w 301787"/>
+              <a:gd name="connsiteY9" fmla="*/ 41153 h 301787"/>
+              <a:gd name="connsiteX10" fmla="*/ 41153 w 301787"/>
+              <a:gd name="connsiteY10" fmla="*/ 27435 h 301787"/>
+              <a:gd name="connsiteX11" fmla="*/ 260635 w 301787"/>
+              <a:gd name="connsiteY11" fmla="*/ 27435 h 301787"/>
+              <a:gd name="connsiteX12" fmla="*/ 274353 w 301787"/>
+              <a:gd name="connsiteY12" fmla="*/ 41153 h 301787"/>
+              <a:gd name="connsiteX13" fmla="*/ 274353 w 301787"/>
+              <a:gd name="connsiteY13" fmla="*/ 260635 h 301787"/>
+              <a:gd name="connsiteX14" fmla="*/ 260635 w 301787"/>
+              <a:gd name="connsiteY14" fmla="*/ 274353 h 301787"/>
+              <a:gd name="connsiteX15" fmla="*/ 41153 w 301787"/>
+              <a:gd name="connsiteY15" fmla="*/ 274353 h 301787"/>
+              <a:gd name="connsiteX16" fmla="*/ 27435 w 301787"/>
+              <a:gd name="connsiteY16" fmla="*/ 260635 h 301787"/>
+            </a:gdLst>
+            <a:ahLst/>
+            <a:cxnLst>
+              <a:cxn ang="0">
+                <a:pos x="connsiteX0" y="connsiteY0"/>
+              </a:cxn>
+              <a:cxn ang="0">
+                <a:pos x="connsiteX1" y="connsiteY1"/>
+              </a:cxn>
+              <a:cxn ang="0">
+                <a:pos x="connsiteX2" y="connsiteY2"/>
+              </a:cxn>
+              <a:cxn ang="0">
+                <a:pos x="connsiteX3" y="connsiteY3"/>
+              </a:cxn>
+              <a:cxn ang="0">
+                <a:pos x="connsiteX4" y="connsiteY4"/>
+              </a:cxn>
+              <a:cxn ang="0">
+                <a:pos x="connsiteX5" y="connsiteY5"/>
+              </a:cxn>
+              <a:cxn ang="0">
+                <a:pos x="connsiteX6" y="connsiteY6"/>
+              </a:cxn>
+              <a:cxn ang="0">
+                <a:pos x="connsiteX7" y="connsiteY7"/>
+              </a:cxn>
+              <a:cxn ang="0">
+                <a:pos x="connsiteX8" y="connsiteY8"/>
+              </a:cxn>
+              <a:cxn ang="0">
+                <a:pos x="connsiteX9" y="connsiteY9"/>
+              </a:cxn>
+              <a:cxn ang="0">
+                <a:pos x="connsiteX10" y="connsiteY10"/>
+              </a:cxn>
+              <a:cxn ang="0">
+                <a:pos x="connsiteX11" y="connsiteY11"/>
+              </a:cxn>
+              <a:cxn ang="0">
+                <a:pos x="connsiteX12" y="connsiteY12"/>
+              </a:cxn>
+              <a:cxn ang="0">
+                <a:pos x="connsiteX13" y="connsiteY13"/>
+              </a:cxn>
+              <a:cxn ang="0">
+                <a:pos x="connsiteX14" y="connsiteY14"/>
+              </a:cxn>
+              <a:cxn ang="0">
+                <a:pos x="connsiteX15" y="connsiteY15"/>
+              </a:cxn>
+              <a:cxn ang="0">
+                <a:pos x="connsiteX16" y="connsiteY16"/>
+              </a:cxn>
+            </a:cxnLst>
+            <a:rect l="l" t="t" r="r" b="b"/>
+            <a:pathLst>
+              <a:path w="301787" h="301787">
+                <a:moveTo>
+                  <a:pt x="41153" y="301788"/>
+                </a:moveTo>
+                <a:lnTo>
+                  <a:pt x="260635" y="301788"/>
+                </a:lnTo>
+                <a:cubicBezTo>
+                  <a:pt x="283364" y="301788"/>
+                  <a:pt x="301788" y="283364"/>
+                  <a:pt x="301788" y="260635"/>
+                </a:cubicBezTo>
+                <a:lnTo>
+                  <a:pt x="301788" y="41153"/>
+                </a:lnTo>
+                <a:cubicBezTo>
+                  <a:pt x="301788" y="18424"/>
+                  <a:pt x="283364" y="0"/>
+                  <a:pt x="260635" y="0"/>
+                </a:cubicBezTo>
+                <a:lnTo>
+                  <a:pt x="41153" y="0"/>
+                </a:lnTo>
+                <a:cubicBezTo>
+                  <a:pt x="18424" y="0"/>
+                  <a:pt x="0" y="18424"/>
+                  <a:pt x="0" y="41153"/>
+                </a:cubicBezTo>
+                <a:lnTo>
+                  <a:pt x="0" y="260635"/>
+                </a:lnTo>
+                <a:cubicBezTo>
+                  <a:pt x="0" y="283364"/>
+                  <a:pt x="18424" y="301788"/>
+                  <a:pt x="41153" y="301788"/>
+                </a:cubicBezTo>
+                <a:close/>
+                <a:moveTo>
+                  <a:pt x="27435" y="41153"/>
+                </a:moveTo>
+                <a:cubicBezTo>
+                  <a:pt x="27435" y="33577"/>
+                  <a:pt x="33577" y="27435"/>
+                  <a:pt x="41153" y="27435"/>
+                </a:cubicBezTo>
+                <a:lnTo>
+                  <a:pt x="260635" y="27435"/>
+                </a:lnTo>
+                <a:cubicBezTo>
+                  <a:pt x="268211" y="27435"/>
+                  <a:pt x="274353" y="33577"/>
+                  <a:pt x="274353" y="41153"/>
+                </a:cubicBezTo>
+                <a:lnTo>
+                  <a:pt x="274353" y="260635"/>
+                </a:lnTo>
+                <a:cubicBezTo>
+                  <a:pt x="274353" y="268211"/>
+                  <a:pt x="268211" y="274353"/>
+                  <a:pt x="260635" y="274353"/>
+                </a:cubicBezTo>
+                <a:lnTo>
+                  <a:pt x="41153" y="274353"/>
+                </a:lnTo>
+                <a:cubicBezTo>
+                  <a:pt x="33577" y="274353"/>
+                  <a:pt x="27435" y="268211"/>
+                  <a:pt x="27435" y="260635"/>
+                </a:cubicBezTo>
+                <a:close/>
+              </a:path>
+            </a:pathLst>
+          </a:custGeom>
+          <a:solidFill>
+            <a:srgbClr val="000000"/>
+          </a:solidFill>
+          <a:ln w="13692" cap="flat">
+            <a:noFill/>
+            <a:prstDash val="solid"/>
+            <a:miter/>
+          </a:ln>
+        </p:spPr>
+        <p:txBody>
+          <a:bodyPr rtlCol="0" anchor="ctr"/>
+          <a:lstStyle/>
+          <a:p>
+            <a:endParaRPr lang="en-US"/>
+          </a:p>
+        </p:txBody>
+      </p:sp>
+      <p:sp>
+        <p:nvSpPr>
+          <p:cNvPr id="19" name="Freeform: Shape 18">
+            <a:extLst>
+              <a:ext uri="{FF2B5EF4-FFF2-40B4-BE49-F238E27FC236}">
+                <a16:creationId xmlns:a16="http://schemas.microsoft.com/office/drawing/2014/main" id="{1D08752D-96CE-7CD5-72E3-728914FC05C8}"/>
+              </a:ext>
+            </a:extLst>
+          </p:cNvPr>
+          <p:cNvSpPr/>
+          <p:nvPr/>
+        </p:nvSpPr>
+        <p:spPr>
+          <a:xfrm>
+            <a:off x="6707340" y="4873446"/>
+            <a:ext cx="184923" cy="260333"/>
+          </a:xfrm>
+          <a:custGeom>
+            <a:avLst/>
+            <a:gdLst>
+              <a:gd name="connsiteX0" fmla="*/ 0 w 184923"/>
+              <a:gd name="connsiteY0" fmla="*/ 260334 h 260333"/>
+              <a:gd name="connsiteX1" fmla="*/ 184923 w 184923"/>
+              <a:gd name="connsiteY1" fmla="*/ 130167 h 260333"/>
+              <a:gd name="connsiteX2" fmla="*/ 0 w 184923"/>
+              <a:gd name="connsiteY2" fmla="*/ 0 h 260333"/>
+              <a:gd name="connsiteX3" fmla="*/ 0 w 184923"/>
+              <a:gd name="connsiteY3" fmla="*/ 260334 h 260333"/>
+            </a:gdLst>
+            <a:ahLst/>
+            <a:cxnLst>
+              <a:cxn ang="0">
+                <a:pos x="connsiteX0" y="connsiteY0"/>
+              </a:cxn>
+              <a:cxn ang="0">
+                <a:pos x="connsiteX1" y="connsiteY1"/>
+              </a:cxn>
+              <a:cxn ang="0">
+                <a:pos x="connsiteX2" y="connsiteY2"/>
+              </a:cxn>
+              <a:cxn ang="0">
+                <a:pos x="connsiteX3" y="connsiteY3"/>
+              </a:cxn>
+            </a:cxnLst>
+            <a:rect l="l" t="t" r="r" b="b"/>
+            <a:pathLst>
+              <a:path w="184923" h="260333">
+                <a:moveTo>
+                  <a:pt x="0" y="260334"/>
+                </a:moveTo>
+                <a:lnTo>
+                  <a:pt x="184923" y="130167"/>
+                </a:lnTo>
+                <a:lnTo>
+                  <a:pt x="0" y="0"/>
+                </a:lnTo>
+                <a:lnTo>
+                  <a:pt x="0" y="260334"/>
+                </a:lnTo>
+                <a:close/>
+              </a:path>
+            </a:pathLst>
+          </a:custGeom>
+          <a:solidFill>
+            <a:srgbClr val="000000"/>
+          </a:solidFill>
+          <a:ln w="6251" cap="flat">
+            <a:noFill/>
+            <a:prstDash val="solid"/>
+            <a:miter/>
+          </a:ln>
+        </p:spPr>
+        <p:txBody>
+          <a:bodyPr rtlCol="0" anchor="ctr"/>
+          <a:lstStyle/>
+          <a:p>
+            <a:endParaRPr lang="en-US"/>
+          </a:p>
+        </p:txBody>
+      </p:sp>
+      <p:sp>
+        <p:nvSpPr>
+          <p:cNvPr id="20" name="Freeform: Shape 19">
+            <a:extLst>
+              <a:ext uri="{FF2B5EF4-FFF2-40B4-BE49-F238E27FC236}">
+                <a16:creationId xmlns:a16="http://schemas.microsoft.com/office/drawing/2014/main" id="{38CABC46-1C9E-57BD-80DE-04CD8054A6CE}"/>
+              </a:ext>
+            </a:extLst>
+          </p:cNvPr>
+          <p:cNvSpPr/>
+          <p:nvPr/>
+        </p:nvSpPr>
+        <p:spPr>
+          <a:xfrm>
+            <a:off x="6901666" y="4873446"/>
+            <a:ext cx="184923" cy="260333"/>
+          </a:xfrm>
+          <a:custGeom>
+            <a:avLst/>
+            <a:gdLst>
+              <a:gd name="connsiteX0" fmla="*/ 0 w 184923"/>
+              <a:gd name="connsiteY0" fmla="*/ 260334 h 260333"/>
+              <a:gd name="connsiteX1" fmla="*/ 184923 w 184923"/>
+              <a:gd name="connsiteY1" fmla="*/ 130167 h 260333"/>
+              <a:gd name="connsiteX2" fmla="*/ 0 w 184923"/>
+              <a:gd name="connsiteY2" fmla="*/ 0 h 260333"/>
+              <a:gd name="connsiteX3" fmla="*/ 0 w 184923"/>
+              <a:gd name="connsiteY3" fmla="*/ 260334 h 260333"/>
+            </a:gdLst>
+            <a:ahLst/>
+            <a:cxnLst>
+              <a:cxn ang="0">
+                <a:pos x="connsiteX0" y="connsiteY0"/>
+              </a:cxn>
+              <a:cxn ang="0">
+                <a:pos x="connsiteX1" y="connsiteY1"/>
+              </a:cxn>
+              <a:cxn ang="0">
+                <a:pos x="connsiteX2" y="connsiteY2"/>
+              </a:cxn>
+              <a:cxn ang="0">
+                <a:pos x="connsiteX3" y="connsiteY3"/>
+              </a:cxn>
+            </a:cxnLst>
+            <a:rect l="l" t="t" r="r" b="b"/>
+            <a:pathLst>
+              <a:path w="184923" h="260333">
+                <a:moveTo>
+                  <a:pt x="0" y="260334"/>
+                </a:moveTo>
+                <a:lnTo>
+                  <a:pt x="184923" y="130167"/>
+                </a:lnTo>
+                <a:lnTo>
+                  <a:pt x="0" y="0"/>
+                </a:lnTo>
+                <a:lnTo>
+                  <a:pt x="0" y="260334"/>
+                </a:lnTo>
+                <a:close/>
+              </a:path>
+            </a:pathLst>
+          </a:custGeom>
+          <a:solidFill>
+            <a:srgbClr val="000000"/>
+          </a:solidFill>
+          <a:ln w="6251" cap="flat">
+            <a:noFill/>
+            <a:prstDash val="solid"/>
+            <a:miter/>
+          </a:ln>
+        </p:spPr>
+        <p:txBody>
+          <a:bodyPr rtlCol="0" anchor="ctr"/>
+          <a:lstStyle/>
+          <a:p>
+            <a:endParaRPr lang="en-US"/>
+          </a:p>
+        </p:txBody>
+      </p:sp>
+      <p:pic>
+        <p:nvPicPr>
+          <p:cNvPr id="22" name="Graphic 21" descr="Back with solid fill">
+            <a:extLst>
+              <a:ext uri="{FF2B5EF4-FFF2-40B4-BE49-F238E27FC236}">
+                <a16:creationId xmlns:a16="http://schemas.microsoft.com/office/drawing/2014/main" id="{3128EEB7-6E48-0EB2-C289-CC666C27D45F}"/>
+              </a:ext>
+            </a:extLst>
+          </p:cNvPr>
+          <p:cNvPicPr>
+            <a:picLocks noChangeAspect="1"/>
+          </p:cNvPicPr>
+          <p:nvPr/>
+        </p:nvPicPr>
+        <p:blipFill>
+          <a:blip r:embed="rId2">
+            <a:extLst>
+              <a:ext uri="{28A0092B-C50C-407E-A947-70E740481C1C}">
+                <a14:useLocalDpi xmlns:a14="http://schemas.microsoft.com/office/drawing/2010/main" val="0"/>
+              </a:ext>
+              <a:ext uri="{96DAC541-7B7A-43D3-8B79-37D633B846F1}">
+                <asvg:svgBlip xmlns:asvg="http://schemas.microsoft.com/office/drawing/2016/SVG/main" r:embed="rId3"/>
+              </a:ext>
+            </a:extLst>
+          </a:blip>
+          <a:stretch>
+            <a:fillRect/>
+          </a:stretch>
+        </p:blipFill>
+        <p:spPr>
+          <a:xfrm rot="1239569" flipV="1">
+            <a:off x="6461799" y="2640759"/>
+            <a:ext cx="780778" cy="372102"/>
+          </a:xfrm>
+          <a:prstGeom prst="rect">
+            <a:avLst/>
+          </a:prstGeom>
+        </p:spPr>
+      </p:pic>
+      <p:cxnSp>
+        <p:nvCxnSpPr>
+          <p:cNvPr id="24" name="Straight Arrow Connector 23">
+            <a:extLst>
+              <a:ext uri="{FF2B5EF4-FFF2-40B4-BE49-F238E27FC236}">
+                <a16:creationId xmlns:a16="http://schemas.microsoft.com/office/drawing/2014/main" id="{E00B7817-8532-9D88-47D6-BBCB739E6162}"/>
+              </a:ext>
+            </a:extLst>
+          </p:cNvPr>
+          <p:cNvCxnSpPr>
+            <a:cxnSpLocks/>
+          </p:cNvCxnSpPr>
+          <p:nvPr/>
+        </p:nvCxnSpPr>
+        <p:spPr>
+          <a:xfrm flipH="1" flipV="1">
+            <a:off x="6391278" y="2394660"/>
+            <a:ext cx="488955" cy="1504"/>
+          </a:xfrm>
+          <a:prstGeom prst="straightConnector1">
+            <a:avLst/>
+          </a:prstGeom>
+          <a:ln>
+            <a:tailEnd type="triangle"/>
+          </a:ln>
+        </p:spPr>
+        <p:style>
+          <a:lnRef idx="2">
+            <a:schemeClr val="accent1"/>
+          </a:lnRef>
+          <a:fillRef idx="0">
+            <a:schemeClr val="accent1"/>
+          </a:fillRef>
+          <a:effectRef idx="1">
+            <a:schemeClr val="accent1"/>
+          </a:effectRef>
+          <a:fontRef idx="minor">
+            <a:schemeClr val="tx1"/>
+          </a:fontRef>
+        </p:style>
+      </p:cxnSp>
+      <p:sp>
+        <p:nvSpPr>
+          <p:cNvPr id="30" name="Rectangle 29">
+            <a:extLst>
+              <a:ext uri="{FF2B5EF4-FFF2-40B4-BE49-F238E27FC236}">
+                <a16:creationId xmlns:a16="http://schemas.microsoft.com/office/drawing/2014/main" id="{22FCC9A0-46AA-FBD8-13E2-BB7BC98A717E}"/>
+              </a:ext>
+            </a:extLst>
+          </p:cNvPr>
+          <p:cNvSpPr/>
+          <p:nvPr/>
+        </p:nvSpPr>
+        <p:spPr>
+          <a:xfrm>
+            <a:off x="6460225" y="2159888"/>
+            <a:ext cx="137176" cy="120138"/>
+          </a:xfrm>
+          <a:prstGeom prst="rect">
+            <a:avLst/>
+          </a:prstGeom>
+          <a:solidFill>
+            <a:srgbClr val="FFC000"/>
+          </a:solidFill>
+          <a:ln w="12700" cap="rnd">
+            <a:round/>
+          </a:ln>
+        </p:spPr>
+        <p:style>
+          <a:lnRef idx="3">
+            <a:schemeClr val="lt1"/>
+          </a:lnRef>
+          <a:fillRef idx="1">
+            <a:schemeClr val="accent2"/>
+          </a:fillRef>
+          <a:effectRef idx="1">
+            <a:schemeClr val="accent2"/>
+          </a:effectRef>
+          <a:fontRef idx="minor">
+            <a:schemeClr val="lt1"/>
+          </a:fontRef>
+        </p:style>
+        <p:txBody>
+          <a:bodyPr rtlCol="0" anchor="ctr"/>
+          <a:lstStyle/>
+          <a:p>
+            <a:pPr algn="ctr"/>
+            <a:endParaRPr lang="en-US"/>
+          </a:p>
+        </p:txBody>
+      </p:sp>
+      <p:sp>
+        <p:nvSpPr>
+          <p:cNvPr id="31" name="Rectangle 30">
+            <a:extLst>
+              <a:ext uri="{FF2B5EF4-FFF2-40B4-BE49-F238E27FC236}">
+                <a16:creationId xmlns:a16="http://schemas.microsoft.com/office/drawing/2014/main" id="{D60D4688-6677-916C-406E-A369A2746928}"/>
+              </a:ext>
+            </a:extLst>
+          </p:cNvPr>
+          <p:cNvSpPr/>
+          <p:nvPr/>
+        </p:nvSpPr>
+        <p:spPr>
+          <a:xfrm>
+            <a:off x="6460225" y="2516144"/>
+            <a:ext cx="137176" cy="120138"/>
+          </a:xfrm>
+          <a:prstGeom prst="rect">
+            <a:avLst/>
+          </a:prstGeom>
+          <a:solidFill>
+            <a:srgbClr val="FFC000"/>
+          </a:solidFill>
+          <a:ln w="12700" cap="rnd">
+            <a:round/>
+          </a:ln>
+        </p:spPr>
+        <p:style>
+          <a:lnRef idx="3">
+            <a:schemeClr val="lt1"/>
+          </a:lnRef>
+          <a:fillRef idx="1">
+            <a:schemeClr val="accent2"/>
+          </a:fillRef>
+          <a:effectRef idx="1">
+            <a:schemeClr val="accent2"/>
+          </a:effectRef>
+          <a:fontRef idx="minor">
+            <a:schemeClr val="lt1"/>
+          </a:fontRef>
+        </p:style>
+        <p:txBody>
+          <a:bodyPr rtlCol="0" anchor="ctr"/>
+          <a:lstStyle/>
+          <a:p>
+            <a:pPr algn="ctr"/>
+            <a:endParaRPr lang="en-US"/>
+          </a:p>
+        </p:txBody>
+      </p:sp>
+      <p:sp>
+        <p:nvSpPr>
+          <p:cNvPr id="32" name="Rectangle 31">
+            <a:extLst>
+              <a:ext uri="{FF2B5EF4-FFF2-40B4-BE49-F238E27FC236}">
+                <a16:creationId xmlns:a16="http://schemas.microsoft.com/office/drawing/2014/main" id="{4627A64C-D880-0D12-5F6E-5486A010E999}"/>
+              </a:ext>
+            </a:extLst>
+          </p:cNvPr>
+          <p:cNvSpPr/>
+          <p:nvPr/>
+        </p:nvSpPr>
+        <p:spPr>
+          <a:xfrm>
+            <a:off x="6652272" y="2108287"/>
+            <a:ext cx="219482" cy="219481"/>
+          </a:xfrm>
+          <a:prstGeom prst="rect">
+            <a:avLst/>
+          </a:prstGeom>
+          <a:solidFill>
+            <a:schemeClr val="accent6">
+              <a:lumMod val="75000"/>
+            </a:schemeClr>
+          </a:solidFill>
+          <a:ln w="12700" cap="rnd">
+            <a:round/>
+          </a:ln>
+        </p:spPr>
+        <p:style>
+          <a:lnRef idx="3">
+            <a:schemeClr val="lt1"/>
+          </a:lnRef>
+          <a:fillRef idx="1">
+            <a:schemeClr val="accent2"/>
+          </a:fillRef>
+          <a:effectRef idx="1">
+            <a:schemeClr val="accent2"/>
+          </a:effectRef>
+          <a:fontRef idx="minor">
+            <a:schemeClr val="lt1"/>
+          </a:fontRef>
+        </p:style>
+        <p:txBody>
+          <a:bodyPr rtlCol="0" anchor="ctr"/>
+          <a:lstStyle/>
+          <a:p>
+            <a:pPr algn="ctr"/>
+            <a:endParaRPr lang="en-US"/>
+          </a:p>
+        </p:txBody>
+      </p:sp>
+      <p:sp>
+        <p:nvSpPr>
+          <p:cNvPr id="33" name="Rectangle 32">
+            <a:extLst>
+              <a:ext uri="{FF2B5EF4-FFF2-40B4-BE49-F238E27FC236}">
+                <a16:creationId xmlns:a16="http://schemas.microsoft.com/office/drawing/2014/main" id="{52971AFF-49B2-C3F5-284F-95C0D8CC529D}"/>
+              </a:ext>
+            </a:extLst>
+          </p:cNvPr>
+          <p:cNvSpPr/>
+          <p:nvPr/>
+        </p:nvSpPr>
+        <p:spPr>
+          <a:xfrm>
+            <a:off x="6652272" y="2472719"/>
+            <a:ext cx="219482" cy="219481"/>
+          </a:xfrm>
+          <a:prstGeom prst="rect">
+            <a:avLst/>
+          </a:prstGeom>
+          <a:solidFill>
+            <a:schemeClr val="accent6">
+              <a:lumMod val="75000"/>
+            </a:schemeClr>
+          </a:solidFill>
+          <a:ln w="12700" cap="rnd">
+            <a:round/>
+          </a:ln>
+        </p:spPr>
+        <p:style>
+          <a:lnRef idx="3">
+            <a:schemeClr val="lt1"/>
+          </a:lnRef>
+          <a:fillRef idx="1">
+            <a:schemeClr val="accent2"/>
+          </a:fillRef>
+          <a:effectRef idx="1">
+            <a:schemeClr val="accent2"/>
+          </a:effectRef>
+          <a:fontRef idx="minor">
+            <a:schemeClr val="lt1"/>
+          </a:fontRef>
+        </p:style>
+        <p:txBody>
+          <a:bodyPr rtlCol="0" anchor="ctr"/>
+          <a:lstStyle/>
+          <a:p>
+            <a:pPr algn="ctr"/>
+            <a:endParaRPr lang="en-US"/>
+          </a:p>
+        </p:txBody>
+      </p:sp>
+      <p:sp>
+        <p:nvSpPr>
+          <p:cNvPr id="34" name="Rectangle 33">
+            <a:extLst>
+              <a:ext uri="{FF2B5EF4-FFF2-40B4-BE49-F238E27FC236}">
+                <a16:creationId xmlns:a16="http://schemas.microsoft.com/office/drawing/2014/main" id="{BCBC8794-0383-DE93-1E56-A166F9353A44}"/>
+              </a:ext>
+            </a:extLst>
+          </p:cNvPr>
+          <p:cNvSpPr/>
+          <p:nvPr/>
+        </p:nvSpPr>
+        <p:spPr>
+          <a:xfrm>
+            <a:off x="6926625" y="2064942"/>
+            <a:ext cx="301786" cy="301787"/>
+          </a:xfrm>
+          <a:prstGeom prst="rect">
+            <a:avLst/>
+          </a:prstGeom>
+          <a:solidFill>
+            <a:schemeClr val="accent4">
+              <a:lumMod val="75000"/>
+            </a:schemeClr>
+          </a:solidFill>
+          <a:ln w="12700" cap="rnd">
+            <a:round/>
+          </a:ln>
+        </p:spPr>
+        <p:style>
+          <a:lnRef idx="3">
+            <a:schemeClr val="lt1"/>
+          </a:lnRef>
+          <a:fillRef idx="1">
+            <a:schemeClr val="accent2"/>
+          </a:fillRef>
+          <a:effectRef idx="1">
+            <a:schemeClr val="accent2"/>
+          </a:effectRef>
+          <a:fontRef idx="minor">
+            <a:schemeClr val="lt1"/>
+          </a:fontRef>
+        </p:style>
+        <p:txBody>
+          <a:bodyPr rtlCol="0" anchor="ctr"/>
+          <a:lstStyle/>
+          <a:p>
+            <a:pPr algn="ctr"/>
+            <a:endParaRPr lang="en-US"/>
+          </a:p>
+        </p:txBody>
+      </p:sp>
+      <p:sp>
+        <p:nvSpPr>
+          <p:cNvPr id="35" name="Rectangle 34">
+            <a:extLst>
+              <a:ext uri="{FF2B5EF4-FFF2-40B4-BE49-F238E27FC236}">
+                <a16:creationId xmlns:a16="http://schemas.microsoft.com/office/drawing/2014/main" id="{B4CCA31A-BB33-4F45-EEA5-7CD268D2831C}"/>
+              </a:ext>
+            </a:extLst>
+          </p:cNvPr>
+          <p:cNvSpPr/>
+          <p:nvPr/>
+        </p:nvSpPr>
+        <p:spPr>
+          <a:xfrm>
+            <a:off x="6926625" y="2434727"/>
+            <a:ext cx="301786" cy="301787"/>
+          </a:xfrm>
+          <a:prstGeom prst="rect">
+            <a:avLst/>
+          </a:prstGeom>
+          <a:solidFill>
+            <a:schemeClr val="accent4">
+              <a:lumMod val="75000"/>
+            </a:schemeClr>
+          </a:solidFill>
+          <a:ln w="12700" cap="rnd">
+            <a:round/>
+          </a:ln>
+        </p:spPr>
+        <p:style>
+          <a:lnRef idx="3">
+            <a:schemeClr val="lt1"/>
+          </a:lnRef>
+          <a:fillRef idx="1">
+            <a:schemeClr val="accent2"/>
+          </a:fillRef>
+          <a:effectRef idx="1">
+            <a:schemeClr val="accent2"/>
+          </a:effectRef>
+          <a:fontRef idx="minor">
+            <a:schemeClr val="lt1"/>
+          </a:fontRef>
+        </p:style>
+        <p:txBody>
+          <a:bodyPr rtlCol="0" anchor="ctr"/>
+          <a:lstStyle/>
+          <a:p>
+            <a:pPr algn="ctr"/>
             <a:endParaRPr lang="en-US"/>
           </a:p>
         </p:txBody>
